--- a/docs/quickguides/pptx/11_Quick_Guide_oneSCM_Rechnung_Zahlung_Kosten_und_Auswertungen.pptx
+++ b/docs/quickguides/pptx/11_Quick_Guide_oneSCM_Rechnung_Zahlung_Kosten_und_Auswertungen.pptx
@@ -1213,11 +1213,11 @@
         <p:spPr>
           <a:xfrm>
             <a:off x="201168" y="713232"/>
-            <a:ext cx="4663440" cy="1472184"/>
+            <a:ext cx="4663440" cy="1581912"/>
           </a:xfrm>
           <a:prstGeom prst="roundRect">
             <a:avLst>
-              <a:gd name="adj" fmla="val 6211"/>
+              <a:gd name="adj" fmla="val 5780"/>
             </a:avLst>
           </a:prstGeom>
           <a:solidFill>
@@ -1281,7 +1281,7 @@
         <p:spPr>
           <a:xfrm>
             <a:off x="310896" y="1060704"/>
-            <a:ext cx="2633472" cy="1069848"/>
+            <a:ext cx="2633472" cy="1179576"/>
           </a:xfrm>
           <a:prstGeom prst="rect">
             <a:avLst/>
@@ -1446,12 +1446,20 @@
           </a:p>
         </p:txBody>
       </p:sp>
-      <p:sp>
-        <p:nvSpPr>
-          <p:cNvPr id="11" name="Screenshot-Rahmen"/>
-          <p:cNvSpPr/>
-          <p:nvPr/>
-        </p:nvSpPr>
+      <p:pic>
+        <p:nvPicPr>
+          <p:cNvPr id="11" name="Kapitelbild" descr="/tmp/claude-0/-home-user-step2-oneSCM/768b354c-b2c6-524c-b102-2abaf010b0fe/scratchpad/qg/src/img/badge_11.png">    </p:cNvPr>
+          <p:cNvPicPr>
+            <a:picLocks noChangeAspect="1"/>
+          </p:cNvPicPr>
+          <p:nvPr/>
+        </p:nvPicPr>
+        <p:blipFill>
+          <a:blip r:embed="rId3"/>
+          <a:stretch>
+            <a:fillRect/>
+          </a:stretch>
+        </p:blipFill>
         <p:spPr>
           <a:xfrm>
             <a:off x="3035808" y="804672"/>
@@ -1460,82 +1468,17 @@
           <a:prstGeom prst="rect">
             <a:avLst/>
           </a:prstGeom>
-          <a:solidFill>
-            <a:srgbClr val="F3F3F3"/>
-          </a:solidFill>
-          <a:ln w="6350">
-            <a:solidFill>
-              <a:srgbClr val="BFBFBF"/>
-            </a:solidFill>
-            <a:prstDash val="solid"/>
-          </a:ln>
-        </p:spPr>
-      </p:sp>
-      <p:sp>
-        <p:nvSpPr>
-          <p:cNvPr id="12" name="Screenshot-Beschriftung"/>
+        </p:spPr>
+      </p:pic>
+      <p:sp>
+        <p:nvSpPr>
+          <p:cNvPr id="12" name="Hinweis"/>
           <p:cNvSpPr txBox="1"/>
           <p:nvPr/>
         </p:nvSpPr>
         <p:spPr>
           <a:xfrm>
-            <a:off x="3035808" y="804672"/>
-            <a:ext cx="1737360" cy="1051560"/>
-          </a:xfrm>
-          <a:prstGeom prst="rect">
-            <a:avLst/>
-          </a:prstGeom>
-          <a:noFill/>
-          <a:ln/>
-        </p:spPr>
-        <p:txBody>
-          <a:bodyPr wrap="square" lIns="50800" tIns="50800" rIns="50800" bIns="50800" rtlCol="0" anchor="ctr"/>
-          <a:lstStyle/>
-          <a:p>
-            <a:pPr algn="ctr" indent="0" marL="0">
-              <a:buNone/>
-            </a:pPr>
-            <a:r>
-              <a:rPr lang="en-US" sz="700" b="1" dirty="0">
-                <a:solidFill>
-                  <a:srgbClr val="404040"/>
-                </a:solidFill>
-                <a:latin typeface="MB Corpo S Text Office" pitchFamily="34" charset="0"/>
-                <a:ea typeface="MB Corpo S Text Office" pitchFamily="34" charset="-122"/>
-                <a:cs typeface="MB Corpo S Text Office" pitchFamily="34" charset="-120"/>
-              </a:rPr>
-              <a:t>Screenshot</a:t>
-            </a:r>
-            <a:endParaRPr lang="en-US" sz="700" dirty="0"/>
-          </a:p>
-          <a:p>
-            <a:pPr algn="ctr" indent="0" marL="0">
-              <a:buNone/>
-            </a:pPr>
-            <a:r>
-              <a:rPr lang="en-US" sz="700" dirty="0">
-                <a:solidFill>
-                  <a:srgbClr val="404040"/>
-                </a:solidFill>
-                <a:latin typeface="MB Corpo S Text Office" pitchFamily="34" charset="0"/>
-                <a:ea typeface="MB Corpo S Text Office" pitchFamily="34" charset="-122"/>
-                <a:cs typeface="MB Corpo S Text Office" pitchFamily="34" charset="-120"/>
-              </a:rPr>
-              <a:t>Zahlplan</a:t>
-            </a:r>
-            <a:endParaRPr lang="en-US" sz="700" dirty="0"/>
-          </a:p>
-        </p:txBody>
-      </p:sp>
-      <p:sp>
-        <p:nvSpPr>
-          <p:cNvPr id="13" name="Hinweis"/>
-          <p:cNvSpPr txBox="1"/>
-          <p:nvPr/>
-        </p:nvSpPr>
-        <p:spPr>
-          <a:xfrm>
-            <a:off x="201168" y="2295144"/>
+            <a:off x="201168" y="2404872"/>
             <a:ext cx="4663440" cy="329184"/>
           </a:xfrm>
           <a:prstGeom prst="rect">
@@ -1568,13 +1511,13 @@
       </p:sp>
       <p:sp>
         <p:nvSpPr>
-          <p:cNvPr id="14" name="Überblick Titel"/>
+          <p:cNvPr id="13" name="Überblick Titel"/>
           <p:cNvSpPr txBox="1"/>
           <p:nvPr/>
         </p:nvSpPr>
         <p:spPr>
           <a:xfrm>
-            <a:off x="201168" y="2734056"/>
+            <a:off x="201168" y="2843784"/>
             <a:ext cx="4663440" cy="256032"/>
           </a:xfrm>
           <a:prstGeom prst="rect">
@@ -1607,13 +1550,13 @@
       </p:sp>
       <p:sp>
         <p:nvSpPr>
-          <p:cNvPr id="15" name="Überblick Spalte"/>
+          <p:cNvPr id="14" name="Überblick Spalte"/>
           <p:cNvSpPr txBox="1"/>
           <p:nvPr/>
         </p:nvSpPr>
         <p:spPr>
           <a:xfrm>
-            <a:off x="201168" y="3008376"/>
+            <a:off x="201168" y="3118104"/>
             <a:ext cx="2240280" cy="1335024"/>
           </a:xfrm>
           <a:prstGeom prst="rect">
@@ -1733,13 +1676,13 @@
       </p:sp>
       <p:sp>
         <p:nvSpPr>
-          <p:cNvPr id="16" name="Überblick Spalte"/>
+          <p:cNvPr id="15" name="Überblick Spalte"/>
           <p:cNvSpPr txBox="1"/>
           <p:nvPr/>
         </p:nvSpPr>
         <p:spPr>
           <a:xfrm>
-            <a:off x="2624328" y="3008376"/>
+            <a:off x="2624328" y="3118104"/>
             <a:ext cx="2240280" cy="1335024"/>
           </a:xfrm>
           <a:prstGeom prst="rect">
@@ -1857,16 +1800,64 @@
           </a:p>
         </p:txBody>
       </p:sp>
-      <p:sp>
-        <p:nvSpPr>
-          <p:cNvPr id="17" name="Abschnittstitel"/>
+      <p:pic>
+        <p:nvPicPr>
+          <p:cNvPr id="16" name="Prozessbild" descr="/tmp/claude-0/-home-user-step2-oneSCM/768b354c-b2c6-524c-b102-2abaf010b0fe/scratchpad/qg/src/img/landscape_11.png">    </p:cNvPr>
+          <p:cNvPicPr>
+            <a:picLocks noChangeAspect="1"/>
+          </p:cNvPicPr>
+          <p:nvPr/>
+        </p:nvPicPr>
+        <p:blipFill>
+          <a:blip r:embed="rId4"/>
+          <a:stretch>
+            <a:fillRect/>
+          </a:stretch>
+        </p:blipFill>
+        <p:spPr>
+          <a:xfrm>
+            <a:off x="201168" y="4562856"/>
+            <a:ext cx="4663440" cy="1207008"/>
+          </a:xfrm>
+          <a:prstGeom prst="rect">
+            <a:avLst/>
+          </a:prstGeom>
+        </p:spPr>
+      </p:pic>
+      <p:pic>
+        <p:nvPicPr>
+          <p:cNvPr id="17" name="Prozessbild" descr="/tmp/claude-0/-home-user-step2-oneSCM/768b354c-b2c6-524c-b102-2abaf010b0fe/scratchpad/qg/src/img/flow_11.png">    </p:cNvPr>
+          <p:cNvPicPr>
+            <a:picLocks noChangeAspect="1"/>
+          </p:cNvPicPr>
+          <p:nvPr/>
+        </p:nvPicPr>
+        <p:blipFill>
+          <a:blip r:embed="rId5"/>
+          <a:stretch>
+            <a:fillRect/>
+          </a:stretch>
+        </p:blipFill>
+        <p:spPr>
+          <a:xfrm>
+            <a:off x="5047488" y="713232"/>
+            <a:ext cx="4663440" cy="1508760"/>
+          </a:xfrm>
+          <a:prstGeom prst="rect">
+            <a:avLst/>
+          </a:prstGeom>
+        </p:spPr>
+      </p:pic>
+      <p:sp>
+        <p:nvSpPr>
+          <p:cNvPr id="18" name="Abschnittstitel"/>
           <p:cNvSpPr txBox="1"/>
           <p:nvPr/>
         </p:nvSpPr>
         <p:spPr>
           <a:xfrm>
-            <a:off x="5047488" y="713232"/>
-            <a:ext cx="2816352" cy="256032"/>
+            <a:off x="5047488" y="2331720"/>
+            <a:ext cx="4663440" cy="256032"/>
           </a:xfrm>
           <a:prstGeom prst="rect">
             <a:avLst/>
@@ -1898,14 +1889,14 @@
       </p:sp>
       <p:sp>
         <p:nvSpPr>
-          <p:cNvPr id="18" name="Schritte"/>
+          <p:cNvPr id="19" name="Schritte"/>
           <p:cNvSpPr txBox="1"/>
           <p:nvPr/>
         </p:nvSpPr>
         <p:spPr>
           <a:xfrm>
-            <a:off x="5065776" y="987552"/>
-            <a:ext cx="2798064" cy="1508760"/>
+            <a:off x="5065776" y="2606040"/>
+            <a:ext cx="4645152" cy="886968"/>
           </a:xfrm>
           <a:prstGeom prst="rect">
             <a:avLst/>
@@ -2096,94 +2087,13 @@
       </p:sp>
       <p:sp>
         <p:nvSpPr>
-          <p:cNvPr id="19" name="Screenshot-Rahmen"/>
+          <p:cNvPr id="20" name="Warnhinweis"/>
           <p:cNvSpPr/>
           <p:nvPr/>
         </p:nvSpPr>
         <p:spPr>
           <a:xfrm>
-            <a:off x="7973568" y="987552"/>
-            <a:ext cx="1737360" cy="1463040"/>
-          </a:xfrm>
-          <a:prstGeom prst="rect">
-            <a:avLst/>
-          </a:prstGeom>
-          <a:solidFill>
-            <a:srgbClr val="F3F3F3"/>
-          </a:solidFill>
-          <a:ln w="6350">
-            <a:solidFill>
-              <a:srgbClr val="BFBFBF"/>
-            </a:solidFill>
-            <a:prstDash val="solid"/>
-          </a:ln>
-        </p:spPr>
-      </p:sp>
-      <p:sp>
-        <p:nvSpPr>
-          <p:cNvPr id="20" name="Screenshot-Beschriftung"/>
-          <p:cNvSpPr txBox="1"/>
-          <p:nvPr/>
-        </p:nvSpPr>
-        <p:spPr>
-          <a:xfrm>
-            <a:off x="7973568" y="987552"/>
-            <a:ext cx="1737360" cy="1463040"/>
-          </a:xfrm>
-          <a:prstGeom prst="rect">
-            <a:avLst/>
-          </a:prstGeom>
-          <a:noFill/>
-          <a:ln/>
-        </p:spPr>
-        <p:txBody>
-          <a:bodyPr wrap="square" lIns="50800" tIns="50800" rIns="50800" bIns="50800" rtlCol="0" anchor="ctr"/>
-          <a:lstStyle/>
-          <a:p>
-            <a:pPr algn="ctr" indent="0" marL="0">
-              <a:buNone/>
-            </a:pPr>
-            <a:r>
-              <a:rPr lang="en-US" sz="700" b="1" dirty="0">
-                <a:solidFill>
-                  <a:srgbClr val="404040"/>
-                </a:solidFill>
-                <a:latin typeface="MB Corpo S Text Office" pitchFamily="34" charset="0"/>
-                <a:ea typeface="MB Corpo S Text Office" pitchFamily="34" charset="-122"/>
-                <a:cs typeface="MB Corpo S Text Office" pitchFamily="34" charset="-120"/>
-              </a:rPr>
-              <a:t>Screenshot</a:t>
-            </a:r>
-            <a:endParaRPr lang="en-US" sz="700" dirty="0"/>
-          </a:p>
-          <a:p>
-            <a:pPr algn="ctr" indent="0" marL="0">
-              <a:buNone/>
-            </a:pPr>
-            <a:r>
-              <a:rPr lang="en-US" sz="700" dirty="0">
-                <a:solidFill>
-                  <a:srgbClr val="404040"/>
-                </a:solidFill>
-                <a:latin typeface="MB Corpo S Text Office" pitchFamily="34" charset="0"/>
-                <a:ea typeface="MB Corpo S Text Office" pitchFamily="34" charset="-122"/>
-                <a:cs typeface="MB Corpo S Text Office" pitchFamily="34" charset="-120"/>
-              </a:rPr>
-              <a:t>Reporting mit Filtern</a:t>
-            </a:r>
-            <a:endParaRPr lang="en-US" sz="700" dirty="0"/>
-          </a:p>
-        </p:txBody>
-      </p:sp>
-      <p:sp>
-        <p:nvSpPr>
-          <p:cNvPr id="21" name="Warnhinweis"/>
-          <p:cNvSpPr/>
-          <p:nvPr/>
-        </p:nvSpPr>
-        <p:spPr>
-          <a:xfrm>
-            <a:off x="5047488" y="2606040"/>
+            <a:off x="5047488" y="3602736"/>
             <a:ext cx="4663440" cy="612648"/>
           </a:xfrm>
           <a:prstGeom prst="roundRect">
@@ -2204,13 +2114,13 @@
       </p:sp>
       <p:sp>
         <p:nvSpPr>
-          <p:cNvPr id="22" name="Warnzeichen"/>
+          <p:cNvPr id="21" name="Warnzeichen"/>
           <p:cNvSpPr txBox="1"/>
           <p:nvPr/>
         </p:nvSpPr>
         <p:spPr>
           <a:xfrm>
-            <a:off x="5120640" y="2606040"/>
+            <a:off x="5120640" y="3602736"/>
             <a:ext cx="274320" cy="612648"/>
           </a:xfrm>
           <a:prstGeom prst="rect">
@@ -2243,13 +2153,13 @@
       </p:sp>
       <p:sp>
         <p:nvSpPr>
-          <p:cNvPr id="23" name="Warntext"/>
+          <p:cNvPr id="22" name="Warntext"/>
           <p:cNvSpPr txBox="1"/>
           <p:nvPr/>
         </p:nvSpPr>
         <p:spPr>
           <a:xfrm>
-            <a:off x="5458968" y="2606040"/>
+            <a:off x="5458968" y="3602736"/>
             <a:ext cx="4160520" cy="612648"/>
           </a:xfrm>
           <a:prstGeom prst="rect">
@@ -2293,14 +2203,14 @@
       </p:sp>
       <p:sp>
         <p:nvSpPr>
-          <p:cNvPr id="24" name="Schritte"/>
+          <p:cNvPr id="23" name="Schritte"/>
           <p:cNvSpPr txBox="1"/>
           <p:nvPr/>
         </p:nvSpPr>
         <p:spPr>
           <a:xfrm>
-            <a:off x="5065776" y="3328416"/>
-            <a:ext cx="4645152" cy="1024128"/>
+            <a:off x="5065776" y="4325112"/>
+            <a:ext cx="4645152" cy="886968"/>
           </a:xfrm>
           <a:prstGeom prst="rect">
             <a:avLst/>
@@ -2814,11 +2724,11 @@
         <p:spPr>
           <a:xfrm>
             <a:off x="201168" y="713232"/>
-            <a:ext cx="4663440" cy="1965960"/>
+            <a:ext cx="4663440" cy="2112264"/>
           </a:xfrm>
           <a:prstGeom prst="roundRect">
             <a:avLst>
-              <a:gd name="adj" fmla="val 4651"/>
+              <a:gd name="adj" fmla="val 4329"/>
             </a:avLst>
           </a:prstGeom>
           <a:solidFill>
@@ -2882,7 +2792,7 @@
         <p:spPr>
           <a:xfrm>
             <a:off x="310896" y="1060704"/>
-            <a:ext cx="4480560" cy="1563624"/>
+            <a:ext cx="4480560" cy="1709928"/>
           </a:xfrm>
           <a:prstGeom prst="rect">
             <a:avLst/>
@@ -3122,12 +3032,12 @@
         </p:nvSpPr>
         <p:spPr>
           <a:xfrm>
-            <a:off x="201168" y="2788920"/>
-            <a:ext cx="4663440" cy="1115568"/>
+            <a:off x="201168" y="2935224"/>
+            <a:ext cx="4663440" cy="1197864"/>
           </a:xfrm>
           <a:prstGeom prst="roundRect">
             <a:avLst>
-              <a:gd name="adj" fmla="val 8197"/>
+              <a:gd name="adj" fmla="val 7634"/>
             </a:avLst>
           </a:prstGeom>
           <a:solidFill>
@@ -3151,7 +3061,7 @@
         </p:nvSpPr>
         <p:spPr>
           <a:xfrm>
-            <a:off x="310896" y="2862072"/>
+            <a:off x="310896" y="3008376"/>
             <a:ext cx="4480560" cy="256032"/>
           </a:xfrm>
           <a:prstGeom prst="rect">
@@ -3190,8 +3100,8 @@
         </p:nvSpPr>
         <p:spPr>
           <a:xfrm>
-            <a:off x="310896" y="3136392"/>
-            <a:ext cx="4480560" cy="713232"/>
+            <a:off x="310896" y="3282696"/>
+            <a:ext cx="4480560" cy="795528"/>
           </a:xfrm>
           <a:prstGeom prst="rect">
             <a:avLst/>
@@ -3296,12 +3206,12 @@
         </p:nvSpPr>
         <p:spPr>
           <a:xfrm>
-            <a:off x="201168" y="4014216"/>
-            <a:ext cx="4663440" cy="1088136"/>
+            <a:off x="201168" y="4242816"/>
+            <a:ext cx="4663440" cy="1170432"/>
           </a:xfrm>
           <a:prstGeom prst="roundRect">
             <a:avLst>
-              <a:gd name="adj" fmla="val 8403"/>
+              <a:gd name="adj" fmla="val 7813"/>
             </a:avLst>
           </a:prstGeom>
           <a:solidFill>
@@ -3325,7 +3235,7 @@
         </p:nvSpPr>
         <p:spPr>
           <a:xfrm>
-            <a:off x="310896" y="4087368"/>
+            <a:off x="310896" y="4315968"/>
             <a:ext cx="4480560" cy="256032"/>
           </a:xfrm>
           <a:prstGeom prst="rect">
@@ -3364,8 +3274,8 @@
         </p:nvSpPr>
         <p:spPr>
           <a:xfrm>
-            <a:off x="310896" y="4361688"/>
-            <a:ext cx="4480560" cy="685800"/>
+            <a:off x="310896" y="4590288"/>
+            <a:ext cx="4480560" cy="768096"/>
           </a:xfrm>
           <a:prstGeom prst="rect">
             <a:avLst/>
@@ -3450,11 +3360,11 @@
         <p:spPr>
           <a:xfrm>
             <a:off x="5047488" y="713232"/>
-            <a:ext cx="4663440" cy="1673352"/>
+            <a:ext cx="4663440" cy="1536192"/>
           </a:xfrm>
           <a:prstGeom prst="roundRect">
             <a:avLst>
-              <a:gd name="adj" fmla="val 5464"/>
+              <a:gd name="adj" fmla="val 5952"/>
             </a:avLst>
           </a:prstGeom>
           <a:solidFill>
@@ -3479,7 +3389,7 @@
         <p:spPr>
           <a:xfrm>
             <a:off x="5157216" y="786384"/>
-            <a:ext cx="4443984" cy="1545336"/>
+            <a:ext cx="4443984" cy="1408176"/>
           </a:xfrm>
           <a:prstGeom prst="rect">
             <a:avLst/>
@@ -3616,12 +3526,12 @@
         </p:nvSpPr>
         <p:spPr>
           <a:xfrm>
-            <a:off x="5047488" y="2496312"/>
-            <a:ext cx="4663440" cy="1389888"/>
+            <a:off x="5047488" y="2359152"/>
+            <a:ext cx="4663440" cy="1490472"/>
           </a:xfrm>
           <a:prstGeom prst="roundRect">
             <a:avLst>
-              <a:gd name="adj" fmla="val 6579"/>
+              <a:gd name="adj" fmla="val 6135"/>
             </a:avLst>
           </a:prstGeom>
           <a:solidFill>
@@ -3645,7 +3555,7 @@
         </p:nvSpPr>
         <p:spPr>
           <a:xfrm>
-            <a:off x="5157216" y="2569464"/>
+            <a:off x="5157216" y="2432304"/>
             <a:ext cx="4480560" cy="256032"/>
           </a:xfrm>
           <a:prstGeom prst="rect">
@@ -3684,8 +3594,8 @@
         </p:nvSpPr>
         <p:spPr>
           <a:xfrm>
-            <a:off x="5157216" y="2843784"/>
-            <a:ext cx="4480560" cy="987552"/>
+            <a:off x="5157216" y="2706624"/>
+            <a:ext cx="4480560" cy="1088136"/>
           </a:xfrm>
           <a:prstGeom prst="rect">
             <a:avLst/>

--- a/docs/quickguides/pptx/11_Quick_Guide_oneSCM_Rechnung_Zahlung_Kosten_und_Auswertungen.pptx
+++ b/docs/quickguides/pptx/11_Quick_Guide_oneSCM_Rechnung_Zahlung_Kosten_und_Auswertungen.pptx
@@ -1159,7 +1159,7 @@
                 <a:ea typeface="MB Corpo S Text Office" pitchFamily="34" charset="-122"/>
                 <a:cs typeface="MB Corpo S Text Office" pitchFamily="34" charset="-120"/>
               </a:rPr>
-              <a:t>: Dieser Quick Guide fasst Kapitel 11 des oneSCM-Handbuchs zusammen. Details, Bildschirmbilder und Nachweise finden Sie im Handbuchkapitel.</a:t>
+              <a:t>: Dieser Quick Guide fasst Kapitel 11 des oneSCM-Handbuchs zusammen. Details, Bildschirmbilder und Nachweise finden Sie im Handbuch.</a:t>
             </a:r>
             <a:endParaRPr lang="en-US" sz="800" dirty="0"/>
           </a:p>
@@ -2670,7 +2670,7 @@
                 <a:ea typeface="MB Corpo S Text Office" pitchFamily="34" charset="-122"/>
                 <a:cs typeface="MB Corpo S Text Office" pitchFamily="34" charset="-120"/>
               </a:rPr>
-              <a:t>: Dieser Quick Guide fasst Kapitel 11 des oneSCM-Handbuchs zusammen. Details, Bildschirmbilder und Nachweise finden Sie im Handbuchkapitel.</a:t>
+              <a:t>: Dieser Quick Guide fasst Kapitel 11 des oneSCM-Handbuchs zusammen. Details, Bildschirmbilder und Nachweise finden Sie im Handbuch.</a:t>
             </a:r>
             <a:endParaRPr lang="en-US" sz="800" dirty="0"/>
           </a:p>

--- a/docs/quickguides/pptx/11_Quick_Guide_oneSCM_Rechnung_Zahlung_Kosten_und_Auswertungen.pptx
+++ b/docs/quickguides/pptx/11_Quick_Guide_oneSCM_Rechnung_Zahlung_Kosten_und_Auswertungen.pptx
@@ -1503,7 +1503,7 @@
                 <a:ea typeface="MB Corpo S Text Office" pitchFamily="34" charset="-122"/>
                 <a:cs typeface="MB Corpo S Text Office" pitchFamily="34" charset="-120"/>
               </a:rPr>
-              <a:t>Dieses Dokument ist interaktiv – Verweise auf Handbuchkapitel und Systeme sind als Links hinterlegt.</a:t>
+              <a:t>Verweise auf Handbuchkapitel und Systeme sind hervorgehoben; E-Mail-Adressen sind als Links hinterlegt.</a:t>
             </a:r>
             <a:endParaRPr lang="en-US" sz="900" dirty="0"/>
           </a:p>
@@ -3207,11 +3207,11 @@
         <p:spPr>
           <a:xfrm>
             <a:off x="201168" y="4242816"/>
-            <a:ext cx="4663440" cy="1170432"/>
+            <a:ext cx="4663440" cy="1316736"/>
           </a:xfrm>
           <a:prstGeom prst="roundRect">
             <a:avLst>
-              <a:gd name="adj" fmla="val 7813"/>
+              <a:gd name="adj" fmla="val 6944"/>
             </a:avLst>
           </a:prstGeom>
           <a:solidFill>
@@ -3275,7 +3275,7 @@
         <p:spPr>
           <a:xfrm>
             <a:off x="310896" y="4590288"/>
-            <a:ext cx="4480560" cy="768096"/>
+            <a:ext cx="4480560" cy="914400"/>
           </a:xfrm>
           <a:prstGeom prst="rect">
             <a:avLst/>
@@ -3324,7 +3324,7 @@
                 <a:ea typeface="MB Corpo S Text Office" pitchFamily="34" charset="-122"/>
                 <a:cs typeface="MB Corpo S Text Office" pitchFamily="34" charset="-120"/>
               </a:rPr>
-              <a:t>Exporte enthalten personenbezogene Daten; beachten Sie Kapitel 16.1.</a:t>
+              <a:t>Mit der Annahme einer Werkstattrechnung übernimmt das System den Kilometerstand in die Historie des Vertrags (10.9, 11.5).</a:t>
             </a:r>
             <a:endParaRPr lang="en-US" sz="900" dirty="0"/>
           </a:p>
